--- a/(5.19).pptx
+++ b/(5.19).pptx
@@ -113,6 +113,11 @@
       </a:defRPr>
     </a:lvl9pPr>
   </p:defaultTextStyle>
+  <p:extLst>
+    <p:ext uri="{EFAFB233-063F-42B5-8137-9DF3F51BA10A}">
+      <p15:sldGuideLst xmlns:p15="http://schemas.microsoft.com/office/powerpoint/2012/main"/>
+    </p:ext>
+  </p:extLst>
 </p:presentation>
 </file>
 
@@ -129,7 +134,7 @@
   <pc:docChgLst>
     <pc:chgData name="musukie52@gmail.com" userId="017bd91f96aa8751" providerId="LiveId" clId="{5B2C3894-F97E-4CAB-8812-5BB4D83AAC6A}"/>
     <pc:docChg chg="undo custSel addSld delSld modSld">
-      <pc:chgData name="musukie52@gmail.com" userId="017bd91f96aa8751" providerId="LiveId" clId="{5B2C3894-F97E-4CAB-8812-5BB4D83AAC6A}" dt="2026-05-19T06:53:04.874" v="1349" actId="20577"/>
+      <pc:chgData name="musukie52@gmail.com" userId="017bd91f96aa8751" providerId="LiveId" clId="{5B2C3894-F97E-4CAB-8812-5BB4D83AAC6A}" dt="2026-05-20T01:45:50.421" v="1358" actId="20577"/>
       <pc:docMkLst>
         <pc:docMk/>
       </pc:docMkLst>
@@ -164,7 +169,7 @@
         </pc:spChg>
       </pc:sldChg>
       <pc:sldChg chg="modSp new mod">
-        <pc:chgData name="musukie52@gmail.com" userId="017bd91f96aa8751" providerId="LiveId" clId="{5B2C3894-F97E-4CAB-8812-5BB4D83AAC6A}" dt="2026-05-19T05:09:12.956" v="674" actId="20577"/>
+        <pc:chgData name="musukie52@gmail.com" userId="017bd91f96aa8751" providerId="LiveId" clId="{5B2C3894-F97E-4CAB-8812-5BB4D83AAC6A}" dt="2026-05-20T01:45:50.421" v="1358" actId="20577"/>
         <pc:sldMkLst>
           <pc:docMk/>
           <pc:sldMk cId="2805760231" sldId="258"/>
@@ -178,7 +183,7 @@
           </ac:spMkLst>
         </pc:spChg>
         <pc:spChg chg="mod">
-          <ac:chgData name="musukie52@gmail.com" userId="017bd91f96aa8751" providerId="LiveId" clId="{5B2C3894-F97E-4CAB-8812-5BB4D83AAC6A}" dt="2026-05-19T05:09:12.956" v="674" actId="20577"/>
+          <ac:chgData name="musukie52@gmail.com" userId="017bd91f96aa8751" providerId="LiveId" clId="{5B2C3894-F97E-4CAB-8812-5BB4D83AAC6A}" dt="2026-05-20T01:45:50.421" v="1358" actId="20577"/>
           <ac:spMkLst>
             <pc:docMk/>
             <pc:sldMk cId="2805760231" sldId="258"/>
@@ -562,7 +567,7 @@
           <a:p>
             <a:fld id="{E89774C3-FEE3-4E7E-AC9B-46C879A969A4}" type="datetimeFigureOut">
               <a:rPr lang="ko-KR" altLang="en-US" smtClean="0"/>
-              <a:t>2026-05-19</a:t>
+              <a:t>2026-05-20</a:t>
             </a:fld>
             <a:endParaRPr lang="ko-KR" altLang="en-US"/>
           </a:p>
@@ -760,7 +765,7 @@
           <a:p>
             <a:fld id="{E89774C3-FEE3-4E7E-AC9B-46C879A969A4}" type="datetimeFigureOut">
               <a:rPr lang="ko-KR" altLang="en-US" smtClean="0"/>
-              <a:t>2026-05-19</a:t>
+              <a:t>2026-05-20</a:t>
             </a:fld>
             <a:endParaRPr lang="ko-KR" altLang="en-US"/>
           </a:p>
@@ -968,7 +973,7 @@
           <a:p>
             <a:fld id="{E89774C3-FEE3-4E7E-AC9B-46C879A969A4}" type="datetimeFigureOut">
               <a:rPr lang="ko-KR" altLang="en-US" smtClean="0"/>
-              <a:t>2026-05-19</a:t>
+              <a:t>2026-05-20</a:t>
             </a:fld>
             <a:endParaRPr lang="ko-KR" altLang="en-US"/>
           </a:p>
@@ -1166,7 +1171,7 @@
           <a:p>
             <a:fld id="{E89774C3-FEE3-4E7E-AC9B-46C879A969A4}" type="datetimeFigureOut">
               <a:rPr lang="ko-KR" altLang="en-US" smtClean="0"/>
-              <a:t>2026-05-19</a:t>
+              <a:t>2026-05-20</a:t>
             </a:fld>
             <a:endParaRPr lang="ko-KR" altLang="en-US"/>
           </a:p>
@@ -1441,7 +1446,7 @@
           <a:p>
             <a:fld id="{E89774C3-FEE3-4E7E-AC9B-46C879A969A4}" type="datetimeFigureOut">
               <a:rPr lang="ko-KR" altLang="en-US" smtClean="0"/>
-              <a:t>2026-05-19</a:t>
+              <a:t>2026-05-20</a:t>
             </a:fld>
             <a:endParaRPr lang="ko-KR" altLang="en-US"/>
           </a:p>
@@ -1706,7 +1711,7 @@
           <a:p>
             <a:fld id="{E89774C3-FEE3-4E7E-AC9B-46C879A969A4}" type="datetimeFigureOut">
               <a:rPr lang="ko-KR" altLang="en-US" smtClean="0"/>
-              <a:t>2026-05-19</a:t>
+              <a:t>2026-05-20</a:t>
             </a:fld>
             <a:endParaRPr lang="ko-KR" altLang="en-US"/>
           </a:p>
@@ -2118,7 +2123,7 @@
           <a:p>
             <a:fld id="{E89774C3-FEE3-4E7E-AC9B-46C879A969A4}" type="datetimeFigureOut">
               <a:rPr lang="ko-KR" altLang="en-US" smtClean="0"/>
-              <a:t>2026-05-19</a:t>
+              <a:t>2026-05-20</a:t>
             </a:fld>
             <a:endParaRPr lang="ko-KR" altLang="en-US"/>
           </a:p>
@@ -2259,7 +2264,7 @@
           <a:p>
             <a:fld id="{E89774C3-FEE3-4E7E-AC9B-46C879A969A4}" type="datetimeFigureOut">
               <a:rPr lang="ko-KR" altLang="en-US" smtClean="0"/>
-              <a:t>2026-05-19</a:t>
+              <a:t>2026-05-20</a:t>
             </a:fld>
             <a:endParaRPr lang="ko-KR" altLang="en-US"/>
           </a:p>
@@ -2372,7 +2377,7 @@
           <a:p>
             <a:fld id="{E89774C3-FEE3-4E7E-AC9B-46C879A969A4}" type="datetimeFigureOut">
               <a:rPr lang="ko-KR" altLang="en-US" smtClean="0"/>
-              <a:t>2026-05-19</a:t>
+              <a:t>2026-05-20</a:t>
             </a:fld>
             <a:endParaRPr lang="ko-KR" altLang="en-US"/>
           </a:p>
@@ -2683,7 +2688,7 @@
           <a:p>
             <a:fld id="{E89774C3-FEE3-4E7E-AC9B-46C879A969A4}" type="datetimeFigureOut">
               <a:rPr lang="ko-KR" altLang="en-US" smtClean="0"/>
-              <a:t>2026-05-19</a:t>
+              <a:t>2026-05-20</a:t>
             </a:fld>
             <a:endParaRPr lang="ko-KR" altLang="en-US"/>
           </a:p>
@@ -2971,7 +2976,7 @@
           <a:p>
             <a:fld id="{E89774C3-FEE3-4E7E-AC9B-46C879A969A4}" type="datetimeFigureOut">
               <a:rPr lang="ko-KR" altLang="en-US" smtClean="0"/>
-              <a:t>2026-05-19</a:t>
+              <a:t>2026-05-20</a:t>
             </a:fld>
             <a:endParaRPr lang="ko-KR" altLang="en-US"/>
           </a:p>
@@ -3212,7 +3217,7 @@
           <a:p>
             <a:fld id="{E89774C3-FEE3-4E7E-AC9B-46C879A969A4}" type="datetimeFigureOut">
               <a:rPr lang="ko-KR" altLang="en-US" smtClean="0"/>
-              <a:t>2026-05-19</a:t>
+              <a:t>2026-05-20</a:t>
             </a:fld>
             <a:endParaRPr lang="ko-KR" altLang="en-US"/>
           </a:p>
@@ -3898,7 +3903,7 @@
           <a:p>
             <a:r>
               <a:rPr lang="ko-KR" altLang="en-US" dirty="0"/>
-              <a:t>그냥 다가가면 길고양이는 위협하면서 못 지나간다</a:t>
+              <a:t>그냥 다가가면 길고양이가 위협해서 못 지나간다</a:t>
             </a:r>
             <a:r>
               <a:rPr lang="en-US" altLang="ko-KR" dirty="0"/>
